--- a/docs/pptx/auc3/ritu-auc3-cox-linear-ratio-death_10pct.pptx
+++ b/docs/pptx/auc3/ritu-auc3-cox-linear-ratio-death_10pct.pptx
@@ -2443,7 +2443,7 @@
           </p:nvSpPr>
           <p:spPr>
             <a:xfrm>
-              <a:off x="1012387" y="2073503"/>
+              <a:off x="1013326" y="2073503"/>
               <a:ext cx="0" cy="3649639"/>
             </a:xfrm>
             <a:custGeom>
@@ -2486,7 +2486,7 @@
           </p:nvSpPr>
           <p:spPr>
             <a:xfrm>
-              <a:off x="1914572" y="2073503"/>
+              <a:off x="1915271" y="2073503"/>
               <a:ext cx="0" cy="3649639"/>
             </a:xfrm>
             <a:custGeom>
@@ -2529,7 +2529,7 @@
           </p:nvSpPr>
           <p:spPr>
             <a:xfrm>
-              <a:off x="2816756" y="2073503"/>
+              <a:off x="2817216" y="2073503"/>
               <a:ext cx="0" cy="3649639"/>
             </a:xfrm>
             <a:custGeom>
@@ -2572,7 +2572,7 @@
           </p:nvSpPr>
           <p:spPr>
             <a:xfrm>
-              <a:off x="3718941" y="2073503"/>
+              <a:off x="3719160" y="2073503"/>
               <a:ext cx="0" cy="3649639"/>
             </a:xfrm>
             <a:custGeom>
@@ -2615,7 +2615,7 @@
           </p:nvSpPr>
           <p:spPr>
             <a:xfrm>
-              <a:off x="4621125" y="2073503"/>
+              <a:off x="4621105" y="2073503"/>
               <a:ext cx="0" cy="3649639"/>
             </a:xfrm>
             <a:custGeom>
@@ -2658,7 +2658,7 @@
           </p:nvSpPr>
           <p:spPr>
             <a:xfrm>
-              <a:off x="5523310" y="2073503"/>
+              <a:off x="5523050" y="2073503"/>
               <a:ext cx="0" cy="3649639"/>
             </a:xfrm>
             <a:custGeom>
@@ -2701,7 +2701,7 @@
           </p:nvSpPr>
           <p:spPr>
             <a:xfrm>
-              <a:off x="6425495" y="2073503"/>
+              <a:off x="6424995" y="2073503"/>
               <a:ext cx="0" cy="3649639"/>
             </a:xfrm>
             <a:custGeom>
@@ -2744,7 +2744,7 @@
           </p:nvSpPr>
           <p:spPr>
             <a:xfrm>
-              <a:off x="7327679" y="2073503"/>
+              <a:off x="7326940" y="2073503"/>
               <a:ext cx="0" cy="3649639"/>
             </a:xfrm>
             <a:custGeom>
@@ -2787,7 +2787,7 @@
           </p:nvSpPr>
           <p:spPr>
             <a:xfrm>
-              <a:off x="8229864" y="2073503"/>
+              <a:off x="8228885" y="2073503"/>
               <a:ext cx="0" cy="3649639"/>
             </a:xfrm>
             <a:custGeom>
@@ -3045,7 +3045,7 @@
           </p:nvSpPr>
           <p:spPr>
             <a:xfrm>
-              <a:off x="1463479" y="2073503"/>
+              <a:off x="1464298" y="2073503"/>
               <a:ext cx="0" cy="3649639"/>
             </a:xfrm>
             <a:custGeom>
@@ -3088,7 +3088,7 @@
           </p:nvSpPr>
           <p:spPr>
             <a:xfrm>
-              <a:off x="2365664" y="2073503"/>
+              <a:off x="2366243" y="2073503"/>
               <a:ext cx="0" cy="3649639"/>
             </a:xfrm>
             <a:custGeom>
@@ -3131,7 +3131,7 @@
           </p:nvSpPr>
           <p:spPr>
             <a:xfrm>
-              <a:off x="3267849" y="2073503"/>
+              <a:off x="3268188" y="2073503"/>
               <a:ext cx="0" cy="3649639"/>
             </a:xfrm>
             <a:custGeom>
@@ -3174,7 +3174,7 @@
           </p:nvSpPr>
           <p:spPr>
             <a:xfrm>
-              <a:off x="4170033" y="2073503"/>
+              <a:off x="4170133" y="2073503"/>
               <a:ext cx="0" cy="3649639"/>
             </a:xfrm>
             <a:custGeom>
@@ -3217,7 +3217,7 @@
           </p:nvSpPr>
           <p:spPr>
             <a:xfrm>
-              <a:off x="5072218" y="2073503"/>
+              <a:off x="5072078" y="2073503"/>
               <a:ext cx="0" cy="3649639"/>
             </a:xfrm>
             <a:custGeom>
@@ -3260,7 +3260,7 @@
           </p:nvSpPr>
           <p:spPr>
             <a:xfrm>
-              <a:off x="5974402" y="2073503"/>
+              <a:off x="5974022" y="2073503"/>
               <a:ext cx="0" cy="3649639"/>
             </a:xfrm>
             <a:custGeom>
@@ -3303,7 +3303,7 @@
           </p:nvSpPr>
           <p:spPr>
             <a:xfrm>
-              <a:off x="6876587" y="2073503"/>
+              <a:off x="6875967" y="2073503"/>
               <a:ext cx="0" cy="3649639"/>
             </a:xfrm>
             <a:custGeom>
@@ -3346,7 +3346,7 @@
           </p:nvSpPr>
           <p:spPr>
             <a:xfrm>
-              <a:off x="7778772" y="2073503"/>
+              <a:off x="7777912" y="2073503"/>
               <a:ext cx="0" cy="3649639"/>
             </a:xfrm>
             <a:custGeom>
@@ -3432,7 +3432,7 @@
           </p:nvSpPr>
           <p:spPr>
             <a:xfrm>
-              <a:off x="4164901" y="2073503"/>
+              <a:off x="4170171" y="2073503"/>
               <a:ext cx="0" cy="3649639"/>
             </a:xfrm>
             <a:custGeom>
@@ -3705,7 +3705,7 @@
           </p:nvSpPr>
           <p:spPr>
             <a:xfrm>
-              <a:off x="1382692" y="5785772"/>
+              <a:off x="1383511" y="5785772"/>
               <a:ext cx="161574" cy="80101"/>
             </a:xfrm>
             <a:prstGeom prst="rect">
@@ -3751,7 +3751,7 @@
           </p:nvSpPr>
           <p:spPr>
             <a:xfrm>
-              <a:off x="2284877" y="5785772"/>
+              <a:off x="2285456" y="5785772"/>
               <a:ext cx="161574" cy="80101"/>
             </a:xfrm>
             <a:prstGeom prst="rect">
@@ -3797,7 +3797,7 @@
           </p:nvSpPr>
           <p:spPr>
             <a:xfrm>
-              <a:off x="3187061" y="5785772"/>
+              <a:off x="3187401" y="5785772"/>
               <a:ext cx="161574" cy="80101"/>
             </a:xfrm>
             <a:prstGeom prst="rect">
@@ -3843,7 +3843,7 @@
           </p:nvSpPr>
           <p:spPr>
             <a:xfrm>
-              <a:off x="4138944" y="5785772"/>
+              <a:off x="4139043" y="5785772"/>
               <a:ext cx="62179" cy="80101"/>
             </a:xfrm>
             <a:prstGeom prst="rect">
@@ -3889,7 +3889,7 @@
           </p:nvSpPr>
           <p:spPr>
             <a:xfrm>
-              <a:off x="5010039" y="5785772"/>
+              <a:off x="5009898" y="5785772"/>
               <a:ext cx="124358" cy="80101"/>
             </a:xfrm>
             <a:prstGeom prst="rect">
@@ -3935,7 +3935,7 @@
           </p:nvSpPr>
           <p:spPr>
             <a:xfrm>
-              <a:off x="5912223" y="5785772"/>
+              <a:off x="5911843" y="5785772"/>
               <a:ext cx="124358" cy="80101"/>
             </a:xfrm>
             <a:prstGeom prst="rect">
@@ -3981,7 +3981,7 @@
           </p:nvSpPr>
           <p:spPr>
             <a:xfrm>
-              <a:off x="6814408" y="5785772"/>
+              <a:off x="6813788" y="5785772"/>
               <a:ext cx="124358" cy="80101"/>
             </a:xfrm>
             <a:prstGeom prst="rect">
@@ -4027,7 +4027,7 @@
           </p:nvSpPr>
           <p:spPr>
             <a:xfrm>
-              <a:off x="7716592" y="5785772"/>
+              <a:off x="7715733" y="5785772"/>
               <a:ext cx="124358" cy="80101"/>
             </a:xfrm>
             <a:prstGeom prst="rect">
@@ -4198,7 +4198,7 @@
                   <a:latin typeface="Helvetica"/>
                   <a:cs typeface="Helvetica"/>
                 </a:rPr>
-                <a:t>HR per 10 % decline: NA (NA-NA), p_Bonf = NA (n = 6)  |  per IQR decline (Δ = 27.4 %): NA (NA-NA)  |  IQR: [-12.6, 14.8] %</a:t>
+                <a:t>HR per 10 % decline: NA (NA-NA), p_Bonf = NA (n = 6)  |  per IQR decline (Δ = 27.2 %): NA (NA-NA)  |  IQR: [-12.3, 14.9] %</a:t>
               </a:r>
             </a:p>
           </p:txBody>
